--- a/data/inform/Protecto_los_alfas.pptx
+++ b/data/inform/Protecto_los_alfas.pptx
@@ -104,6 +104,11 @@
       </a:defRPr>
     </a:lvl9pPr>
   </p:defaultTextStyle>
+  <p:extLst>
+    <p:ext uri="{EFAFB233-063F-42B5-8137-9DF3F51BA10A}">
+      <p15:sldGuideLst xmlns:p15="http://schemas.microsoft.com/office/powerpoint/2012/main"/>
+    </p:ext>
+  </p:extLst>
 </p:presentation>
 </file>
 

--- a/data/inform/Protecto_los_alfas.pptx
+++ b/data/inform/Protecto_los_alfas.pptx
@@ -104,12 +104,52 @@
       </a:defRPr>
     </a:lvl9pPr>
   </p:defaultTextStyle>
-  <p:extLst>
-    <p:ext uri="{EFAFB233-063F-42B5-8137-9DF3F51BA10A}">
-      <p15:sldGuideLst xmlns:p15="http://schemas.microsoft.com/office/powerpoint/2012/main"/>
-    </p:ext>
-  </p:extLst>
 </p:presentation>
+</file>
+
+<file path=ppt/revisionInfo.xml><?xml version="1.0" encoding="utf-8"?>
+<p1510:revInfo xmlns:a="http://schemas.openxmlformats.org/drawingml/2006/main" xmlns:r="http://schemas.openxmlformats.org/officeDocument/2006/relationships" xmlns:p1510="http://schemas.microsoft.com/office/powerpoint/2015/10/main">
+  <p1510:revLst>
+    <p1510:client id="{29CDCBD8-7AE9-C107-A926-7C79D2FFB611}" v="105" dt="2026-03-16T10:28:49.542"/>
+  </p1510:revLst>
+</p1510:revInfo>
+</file>
+
+<file path=ppt/changesInfos/changesInfo1.xml><?xml version="1.0" encoding="utf-8"?>
+<pc:chgInfo xmlns:a="http://schemas.openxmlformats.org/drawingml/2006/main" xmlns:r="http://schemas.openxmlformats.org/officeDocument/2006/relationships" xmlns:ac="http://schemas.microsoft.com/office/drawing/2013/main/command" xmlns:pc="http://schemas.microsoft.com/office/powerpoint/2013/main/command">
+  <pc:docChgLst>
+    <pc:chgData name="rodyahuatzin@gmail.com" userId="2ed0e8fe3e92a2a9" providerId="Windows Live" clId="Web-{29CDCBD8-7AE9-C107-A926-7C79D2FFB611}"/>
+    <pc:docChg chg="modSld">
+      <pc:chgData name="rodyahuatzin@gmail.com" userId="2ed0e8fe3e92a2a9" providerId="Windows Live" clId="Web-{29CDCBD8-7AE9-C107-A926-7C79D2FFB611}" dt="2026-03-16T10:28:49.542" v="104" actId="20577"/>
+      <pc:docMkLst>
+        <pc:docMk/>
+      </pc:docMkLst>
+      <pc:sldChg chg="modSp">
+        <pc:chgData name="rodyahuatzin@gmail.com" userId="2ed0e8fe3e92a2a9" providerId="Windows Live" clId="Web-{29CDCBD8-7AE9-C107-A926-7C79D2FFB611}" dt="2026-03-16T10:28:49.542" v="104" actId="20577"/>
+        <pc:sldMkLst>
+          <pc:docMk/>
+          <pc:sldMk cId="2626951454" sldId="256"/>
+        </pc:sldMkLst>
+        <pc:spChg chg="mod">
+          <ac:chgData name="rodyahuatzin@gmail.com" userId="2ed0e8fe3e92a2a9" providerId="Windows Live" clId="Web-{29CDCBD8-7AE9-C107-A926-7C79D2FFB611}" dt="2026-03-16T10:28:29.353" v="36" actId="20577"/>
+          <ac:spMkLst>
+            <pc:docMk/>
+            <pc:sldMk cId="2626951454" sldId="256"/>
+            <ac:spMk id="2" creationId="{4EF45B5F-4608-CEA7-5CC5-A303F74C6CD6}"/>
+          </ac:spMkLst>
+        </pc:spChg>
+        <pc:spChg chg="mod">
+          <ac:chgData name="rodyahuatzin@gmail.com" userId="2ed0e8fe3e92a2a9" providerId="Windows Live" clId="Web-{29CDCBD8-7AE9-C107-A926-7C79D2FFB611}" dt="2026-03-16T10:28:49.542" v="104" actId="20577"/>
+          <ac:spMkLst>
+            <pc:docMk/>
+            <pc:sldMk cId="2626951454" sldId="256"/>
+            <ac:spMk id="3" creationId="{F5C0CB2B-C3F8-CB19-2568-6A8FABDCFEDB}"/>
+          </ac:spMkLst>
+        </pc:spChg>
+      </pc:sldChg>
+    </pc:docChg>
+  </pc:docChgLst>
+</pc:chgInfo>
 </file>
 
 <file path=ppt/slideLayouts/slideLayout1.xml><?xml version="1.0" encoding="utf-8"?>
@@ -3347,7 +3387,29 @@
           <a:bodyPr/>
           <a:lstStyle/>
           <a:p>
-            <a:endParaRPr lang="es-ES"/>
+            <a:r>
+              <a:rPr lang="es-ES" sz="4800">
+                <a:latin typeface="Calibri"/>
+                <a:ea typeface="Calibri"/>
+                <a:cs typeface="Calibri"/>
+              </a:rPr>
+              <a:t>S&amp;P500 y IBEX35</a:t>
+            </a:r>
+            <a:br>
+              <a:rPr lang="es-ES" sz="4800">
+                <a:latin typeface="Calibri"/>
+                <a:ea typeface="Calibri"/>
+                <a:cs typeface="Calibri"/>
+              </a:rPr>
+            </a:br>
+            <a:r>
+              <a:rPr lang="es-ES" sz="4800">
+                <a:latin typeface="Calibri"/>
+                <a:ea typeface="Calibri"/>
+                <a:cs typeface="Calibri"/>
+              </a:rPr>
+              <a:t>Proyecto Software</a:t>
+            </a:r>
           </a:p>
         </p:txBody>
       </p:sp>
@@ -3369,10 +3431,27 @@
         </p:nvSpPr>
         <p:spPr/>
         <p:txBody>
-          <a:bodyPr/>
-          <a:lstStyle/>
-          <a:p>
-            <a:endParaRPr lang="es-ES"/>
+          <a:bodyPr vert="horz" lIns="91440" tIns="45720" rIns="91440" bIns="45720" rtlCol="0" anchor="t">
+            <a:normAutofit/>
+          </a:bodyPr>
+          <a:lstStyle/>
+          <a:p>
+            <a:r>
+              <a:rPr lang="es-ES" err="1"/>
+              <a:t>Adrian</a:t>
+            </a:r>
+            <a:r>
+              <a:rPr lang="es-ES"/>
+              <a:t> Reig, Rodrigo </a:t>
+            </a:r>
+            <a:r>
+              <a:rPr lang="es-ES" err="1"/>
+              <a:t>Ahuatzin</a:t>
+            </a:r>
+            <a:r>
+              <a:rPr lang="es-ES"/>
+              <a:t>, Carlos Battistini </a:t>
+            </a:r>
           </a:p>
         </p:txBody>
       </p:sp>
